--- a/TUIA_Segundo/2Cuatrimestre/4C_MachineLearning/Unidad 2_ Regresión Lineal/Clase 5 - Regularización.pptx
+++ b/TUIA_Segundo/2Cuatrimestre/4C_MachineLearning/Unidad 2_ Regresión Lineal/Clase 5 - Regularización.pptx
@@ -82,7 +82,7 @@
         <a:srgbClr val="000000"/>
       </a:buClr>
       <a:buFont typeface="Arial"/>
-      <a:defRPr b="0" i="0" sz="1400" u="none" cap="none" strike="noStrike">
+      <a:defRPr b="0" i="0" spc="0" sz="1400" u="none" cap="none" strike="noStrike">
         <a:solidFill>
           <a:srgbClr val="000000"/>
         </a:solidFill>
@@ -106,7 +106,7 @@
         <a:srgbClr val="000000"/>
       </a:buClr>
       <a:buFont typeface="Arial"/>
-      <a:defRPr b="0" i="0" sz="1400" u="none" cap="none" strike="noStrike">
+      <a:defRPr b="0" i="0" spc="0" sz="1400" u="none" cap="none" strike="noStrike">
         <a:solidFill>
           <a:srgbClr val="000000"/>
         </a:solidFill>
@@ -130,7 +130,7 @@
         <a:srgbClr val="000000"/>
       </a:buClr>
       <a:buFont typeface="Arial"/>
-      <a:defRPr b="0" i="0" sz="1400" u="none" cap="none" strike="noStrike">
+      <a:defRPr b="0" i="0" spc="0" sz="1400" u="none" cap="none" strike="noStrike">
         <a:solidFill>
           <a:srgbClr val="000000"/>
         </a:solidFill>
@@ -154,7 +154,7 @@
         <a:srgbClr val="000000"/>
       </a:buClr>
       <a:buFont typeface="Arial"/>
-      <a:defRPr b="0" i="0" sz="1400" u="none" cap="none" strike="noStrike">
+      <a:defRPr b="0" i="0" spc="0" sz="1400" u="none" cap="none" strike="noStrike">
         <a:solidFill>
           <a:srgbClr val="000000"/>
         </a:solidFill>
@@ -178,7 +178,7 @@
         <a:srgbClr val="000000"/>
       </a:buClr>
       <a:buFont typeface="Arial"/>
-      <a:defRPr b="0" i="0" sz="1400" u="none" cap="none" strike="noStrike">
+      <a:defRPr b="0" i="0" spc="0" sz="1400" u="none" cap="none" strike="noStrike">
         <a:solidFill>
           <a:srgbClr val="000000"/>
         </a:solidFill>
@@ -202,7 +202,7 @@
         <a:srgbClr val="000000"/>
       </a:buClr>
       <a:buFont typeface="Arial"/>
-      <a:defRPr b="0" i="0" sz="1400" u="none" cap="none" strike="noStrike">
+      <a:defRPr b="0" i="0" spc="0" sz="1400" u="none" cap="none" strike="noStrike">
         <a:solidFill>
           <a:srgbClr val="000000"/>
         </a:solidFill>
@@ -226,7 +226,7 @@
         <a:srgbClr val="000000"/>
       </a:buClr>
       <a:buFont typeface="Arial"/>
-      <a:defRPr b="0" i="0" sz="1400" u="none" cap="none" strike="noStrike">
+      <a:defRPr b="0" i="0" spc="0" sz="1400" u="none" cap="none" strike="noStrike">
         <a:solidFill>
           <a:srgbClr val="000000"/>
         </a:solidFill>
@@ -250,7 +250,7 @@
         <a:srgbClr val="000000"/>
       </a:buClr>
       <a:buFont typeface="Arial"/>
-      <a:defRPr b="0" i="0" sz="1400" u="none" cap="none" strike="noStrike">
+      <a:defRPr b="0" i="0" spc="0" sz="1400" u="none" cap="none" strike="noStrike">
         <a:solidFill>
           <a:srgbClr val="000000"/>
         </a:solidFill>
@@ -274,7 +274,7 @@
         <a:srgbClr val="000000"/>
       </a:buClr>
       <a:buFont typeface="Arial"/>
-      <a:defRPr b="0" i="0" sz="1400" u="none" cap="none" strike="noStrike">
+      <a:defRPr b="0" i="0" spc="0" sz="1400" u="none" cap="none" strike="noStrike">
         <a:solidFill>
           <a:srgbClr val="000000"/>
         </a:solidFill>
@@ -301,7 +301,7 @@
       </p15:sldGuideLst>
     </p:ext>
     <p:ext uri="GoogleSlidesCustomDataVersion2">
-      <go:slidesCustomData xmlns:go="http://customooxmlschemas.google.com/" r:id="rId37" roundtripDataSignature="AMtx7miWa/U2NqYlbAMnkjM7/cDr1EA5LA=="/>
+      <go:slidesCustomData xmlns:go="http://customooxmlschemas.google.com/" r:id="rId37" roundtripDataSignature="AMtx7mhbU1err0aUhehKlq8eSE2IVyXfLA=="/>
     </p:ext>
   </p:extLst>
 </p:presentation>
@@ -662,7 +662,7 @@
         <a:srgbClr val="000000"/>
       </a:buClr>
       <a:buFont typeface="Arial"/>
-      <a:defRPr b="0" i="0" sz="1400" u="none" cap="none" strike="noStrike">
+      <a:defRPr b="0" i="0" spc="0" sz="1400" u="none" cap="none" strike="noStrike">
         <a:solidFill>
           <a:srgbClr val="000000"/>
         </a:solidFill>
@@ -686,7 +686,7 @@
         <a:srgbClr val="000000"/>
       </a:buClr>
       <a:buFont typeface="Arial"/>
-      <a:defRPr b="0" i="0" sz="1400" u="none" cap="none" strike="noStrike">
+      <a:defRPr b="0" i="0" spc="0" sz="1400" u="none" cap="none" strike="noStrike">
         <a:solidFill>
           <a:srgbClr val="000000"/>
         </a:solidFill>
@@ -710,7 +710,7 @@
         <a:srgbClr val="000000"/>
       </a:buClr>
       <a:buFont typeface="Arial"/>
-      <a:defRPr b="0" i="0" sz="1400" u="none" cap="none" strike="noStrike">
+      <a:defRPr b="0" i="0" spc="0" sz="1400" u="none" cap="none" strike="noStrike">
         <a:solidFill>
           <a:srgbClr val="000000"/>
         </a:solidFill>
@@ -734,7 +734,7 @@
         <a:srgbClr val="000000"/>
       </a:buClr>
       <a:buFont typeface="Arial"/>
-      <a:defRPr b="0" i="0" sz="1400" u="none" cap="none" strike="noStrike">
+      <a:defRPr b="0" i="0" spc="0" sz="1400" u="none" cap="none" strike="noStrike">
         <a:solidFill>
           <a:srgbClr val="000000"/>
         </a:solidFill>
@@ -758,7 +758,7 @@
         <a:srgbClr val="000000"/>
       </a:buClr>
       <a:buFont typeface="Arial"/>
-      <a:defRPr b="0" i="0" sz="1400" u="none" cap="none" strike="noStrike">
+      <a:defRPr b="0" i="0" spc="0" sz="1400" u="none" cap="none" strike="noStrike">
         <a:solidFill>
           <a:srgbClr val="000000"/>
         </a:solidFill>
@@ -782,7 +782,7 @@
         <a:srgbClr val="000000"/>
       </a:buClr>
       <a:buFont typeface="Arial"/>
-      <a:defRPr b="0" i="0" sz="1400" u="none" cap="none" strike="noStrike">
+      <a:defRPr b="0" i="0" spc="0" sz="1400" u="none" cap="none" strike="noStrike">
         <a:solidFill>
           <a:srgbClr val="000000"/>
         </a:solidFill>
@@ -806,7 +806,7 @@
         <a:srgbClr val="000000"/>
       </a:buClr>
       <a:buFont typeface="Arial"/>
-      <a:defRPr b="0" i="0" sz="1400" u="none" cap="none" strike="noStrike">
+      <a:defRPr b="0" i="0" spc="0" sz="1400" u="none" cap="none" strike="noStrike">
         <a:solidFill>
           <a:srgbClr val="000000"/>
         </a:solidFill>
@@ -830,7 +830,7 @@
         <a:srgbClr val="000000"/>
       </a:buClr>
       <a:buFont typeface="Arial"/>
-      <a:defRPr b="0" i="0" sz="1400" u="none" cap="none" strike="noStrike">
+      <a:defRPr b="0" i="0" spc="0" sz="1400" u="none" cap="none" strike="noStrike">
         <a:solidFill>
           <a:srgbClr val="000000"/>
         </a:solidFill>
@@ -854,7 +854,7 @@
         <a:srgbClr val="000000"/>
       </a:buClr>
       <a:buFont typeface="Arial"/>
-      <a:defRPr b="0" i="0" sz="1400" u="none" cap="none" strike="noStrike">
+      <a:defRPr b="0" i="0" spc="0" sz="1400" u="none" cap="none" strike="noStrike">
         <a:solidFill>
           <a:srgbClr val="000000"/>
         </a:solidFill>
@@ -4863,8 +4863,15 @@
 </file>
 
 <file path=ppt/slideLayouts/slideLayout2.xml><?xml version="1.0" encoding="utf-8"?>
-<p:sldLayout xmlns:a="http://schemas.openxmlformats.org/drawingml/2006/main" xmlns:r="http://schemas.openxmlformats.org/officeDocument/2006/relationships" xmlns:mc="http://schemas.openxmlformats.org/markup-compatibility/2006" xmlns:mv="urn:schemas-microsoft-com:mac:vml" xmlns:p="http://schemas.openxmlformats.org/presentationml/2006/main" xmlns:c="http://schemas.openxmlformats.org/drawingml/2006/chart" xmlns:dgm="http://schemas.openxmlformats.org/drawingml/2006/diagram" xmlns:o="urn:schemas-microsoft-com:office:office" xmlns:v="urn:schemas-microsoft-com:vml" xmlns:pvml="urn:schemas-microsoft-com:office:powerpoint" xmlns:com="http://schemas.openxmlformats.org/drawingml/2006/compatibility" xmlns:p14="http://schemas.microsoft.com/office/powerpoint/2010/main" xmlns:p15="http://schemas.microsoft.com/office/powerpoint/2012/main" xmlns:ahyp="http://schemas.microsoft.com/office/drawing/2018/hyperlinkcolor" matchingName="Title and body" type="tx">
-  <p:cSld name="TITLE_AND_BODY">
+<p:sldLayout xmlns:a="http://schemas.openxmlformats.org/drawingml/2006/main" xmlns:r="http://schemas.openxmlformats.org/officeDocument/2006/relationships" xmlns:mc="http://schemas.openxmlformats.org/markup-compatibility/2006" xmlns:mv="urn:schemas-microsoft-com:mac:vml" xmlns:p="http://schemas.openxmlformats.org/presentationml/2006/main" xmlns:c="http://schemas.openxmlformats.org/drawingml/2006/chart" xmlns:dgm="http://schemas.openxmlformats.org/drawingml/2006/diagram" xmlns:o="urn:schemas-microsoft-com:office:office" xmlns:v="urn:schemas-microsoft-com:vml" xmlns:pvml="urn:schemas-microsoft-com:office:powerpoint" xmlns:com="http://schemas.openxmlformats.org/drawingml/2006/compatibility" xmlns:p14="http://schemas.microsoft.com/office/powerpoint/2010/main" xmlns:p15="http://schemas.microsoft.com/office/powerpoint/2012/main" xmlns:ahyp="http://schemas.microsoft.com/office/drawing/2018/hyperlinkcolor" matchingName="Section header" type="secHead">
+  <p:cSld name="SECTION_HEADER">
+    <p:bg>
+      <p:bgPr>
+        <a:solidFill>
+          <a:schemeClr val="dk1"/>
+        </a:solidFill>
+      </p:bgPr>
+    </p:bg>
     <p:spTree>
       <p:nvGrpSpPr>
         <p:cNvPr id="17" name="Shape 17"/>
@@ -4879,9 +4886,665 @@
           <a:chExt cx="0" cy="0"/>
         </a:xfrm>
       </p:grpSpPr>
+      <p:grpSp>
+        <p:nvGrpSpPr>
+          <p:cNvPr id="18" name="Google Shape;18;p60"/>
+          <p:cNvGrpSpPr/>
+          <p:nvPr/>
+        </p:nvGrpSpPr>
+        <p:grpSpPr>
+          <a:xfrm>
+            <a:off x="830392" y="1191256"/>
+            <a:ext cx="745763" cy="45826"/>
+            <a:chOff x="4580561" y="2589004"/>
+            <a:chExt cx="1064464" cy="25200"/>
+          </a:xfrm>
+        </p:grpSpPr>
+        <p:sp>
+          <p:nvSpPr>
+            <p:cNvPr id="19" name="Google Shape;19;p60"/>
+            <p:cNvSpPr/>
+            <p:nvPr/>
+          </p:nvSpPr>
+          <p:spPr>
+            <a:xfrm rot="-5400000">
+              <a:off x="5366325" y="2335504"/>
+              <a:ext cx="25200" cy="532200"/>
+            </a:xfrm>
+            <a:prstGeom prst="rect">
+              <a:avLst/>
+            </a:prstGeom>
+            <a:solidFill>
+              <a:schemeClr val="lt1"/>
+            </a:solidFill>
+            <a:ln>
+              <a:noFill/>
+            </a:ln>
+          </p:spPr>
+          <p:txBody>
+            <a:bodyPr anchorCtr="0" anchor="ctr" bIns="91425" lIns="91425" spcFirstLastPara="1" rIns="91425" wrap="square" tIns="91425">
+              <a:noAutofit/>
+            </a:bodyPr>
+            <a:lstStyle/>
+            <a:p>
+              <a:pPr indent="0" lvl="0" marL="0" marR="0" rtl="0" algn="l">
+                <a:lnSpc>
+                  <a:spcPct val="100000"/>
+                </a:lnSpc>
+                <a:spcBef>
+                  <a:spcPts val="0"/>
+                </a:spcBef>
+                <a:spcAft>
+                  <a:spcPts val="0"/>
+                </a:spcAft>
+                <a:buClr>
+                  <a:srgbClr val="000000"/>
+                </a:buClr>
+                <a:buSzPts val="1400"/>
+                <a:buFont typeface="Arial"/>
+                <a:buNone/>
+              </a:pPr>
+              <a:r>
+                <a:t/>
+              </a:r>
+              <a:endParaRPr b="0" i="0" sz="1400" u="none" cap="none" strike="noStrike">
+                <a:solidFill>
+                  <a:srgbClr val="000000"/>
+                </a:solidFill>
+                <a:latin typeface="Arial"/>
+                <a:ea typeface="Arial"/>
+                <a:cs typeface="Arial"/>
+                <a:sym typeface="Arial"/>
+              </a:endParaRPr>
+            </a:p>
+          </p:txBody>
+        </p:sp>
+        <p:sp>
+          <p:nvSpPr>
+            <p:cNvPr id="20" name="Google Shape;20;p60"/>
+            <p:cNvSpPr/>
+            <p:nvPr/>
+          </p:nvSpPr>
+          <p:spPr>
+            <a:xfrm rot="-5400000">
+              <a:off x="4836311" y="2333254"/>
+              <a:ext cx="25200" cy="536700"/>
+            </a:xfrm>
+            <a:prstGeom prst="rect">
+              <a:avLst/>
+            </a:prstGeom>
+            <a:solidFill>
+              <a:schemeClr val="lt1"/>
+            </a:solidFill>
+            <a:ln>
+              <a:noFill/>
+            </a:ln>
+          </p:spPr>
+          <p:txBody>
+            <a:bodyPr anchorCtr="0" anchor="ctr" bIns="91425" lIns="91425" spcFirstLastPara="1" rIns="91425" wrap="square" tIns="91425">
+              <a:noAutofit/>
+            </a:bodyPr>
+            <a:lstStyle/>
+            <a:p>
+              <a:pPr indent="0" lvl="0" marL="0" marR="0" rtl="0" algn="l">
+                <a:lnSpc>
+                  <a:spcPct val="100000"/>
+                </a:lnSpc>
+                <a:spcBef>
+                  <a:spcPts val="0"/>
+                </a:spcBef>
+                <a:spcAft>
+                  <a:spcPts val="0"/>
+                </a:spcAft>
+                <a:buClr>
+                  <a:srgbClr val="000000"/>
+                </a:buClr>
+                <a:buSzPts val="1400"/>
+                <a:buFont typeface="Arial"/>
+                <a:buNone/>
+              </a:pPr>
+              <a:r>
+                <a:t/>
+              </a:r>
+              <a:endParaRPr b="0" i="0" sz="1400" u="none" cap="none" strike="noStrike">
+                <a:solidFill>
+                  <a:srgbClr val="000000"/>
+                </a:solidFill>
+                <a:latin typeface="Arial"/>
+                <a:ea typeface="Arial"/>
+                <a:cs typeface="Arial"/>
+                <a:sym typeface="Arial"/>
+              </a:endParaRPr>
+            </a:p>
+          </p:txBody>
+        </p:sp>
+      </p:grpSp>
       <p:sp>
         <p:nvSpPr>
-          <p:cNvPr id="18" name="Google Shape;18;p58"/>
+          <p:cNvPr id="21" name="Google Shape;21;p60"/>
+          <p:cNvSpPr txBox="1"/>
+          <p:nvPr>
+            <p:ph type="title"/>
+          </p:nvPr>
+        </p:nvSpPr>
+        <p:spPr>
+          <a:xfrm>
+            <a:off x="729450" y="1322450"/>
+            <a:ext cx="7688400" cy="1518600"/>
+          </a:xfrm>
+          <a:prstGeom prst="rect">
+            <a:avLst/>
+          </a:prstGeom>
+          <a:noFill/>
+          <a:ln>
+            <a:noFill/>
+          </a:ln>
+        </p:spPr>
+        <p:txBody>
+          <a:bodyPr anchorCtr="0" anchor="t" bIns="91425" lIns="91425" spcFirstLastPara="1" rIns="91425" wrap="square" tIns="91425">
+            <a:normAutofit/>
+          </a:bodyPr>
+          <a:lstStyle>
+            <a:lvl1pPr lvl="0" algn="l">
+              <a:lnSpc>
+                <a:spcPct val="100000"/>
+              </a:lnSpc>
+              <a:spcBef>
+                <a:spcPts val="0"/>
+              </a:spcBef>
+              <a:spcAft>
+                <a:spcPts val="0"/>
+              </a:spcAft>
+              <a:buClr>
+                <a:schemeClr val="lt1"/>
+              </a:buClr>
+              <a:buSzPts val="3600"/>
+              <a:buNone/>
+              <a:defRPr sz="3600">
+                <a:solidFill>
+                  <a:schemeClr val="lt1"/>
+                </a:solidFill>
+              </a:defRPr>
+            </a:lvl1pPr>
+            <a:lvl2pPr lvl="1" algn="l">
+              <a:lnSpc>
+                <a:spcPct val="100000"/>
+              </a:lnSpc>
+              <a:spcBef>
+                <a:spcPts val="0"/>
+              </a:spcBef>
+              <a:spcAft>
+                <a:spcPts val="0"/>
+              </a:spcAft>
+              <a:buClr>
+                <a:schemeClr val="lt1"/>
+              </a:buClr>
+              <a:buSzPts val="3600"/>
+              <a:buNone/>
+              <a:defRPr sz="3600">
+                <a:solidFill>
+                  <a:schemeClr val="lt1"/>
+                </a:solidFill>
+              </a:defRPr>
+            </a:lvl2pPr>
+            <a:lvl3pPr lvl="2" algn="l">
+              <a:lnSpc>
+                <a:spcPct val="100000"/>
+              </a:lnSpc>
+              <a:spcBef>
+                <a:spcPts val="0"/>
+              </a:spcBef>
+              <a:spcAft>
+                <a:spcPts val="0"/>
+              </a:spcAft>
+              <a:buClr>
+                <a:schemeClr val="lt1"/>
+              </a:buClr>
+              <a:buSzPts val="3600"/>
+              <a:buNone/>
+              <a:defRPr sz="3600">
+                <a:solidFill>
+                  <a:schemeClr val="lt1"/>
+                </a:solidFill>
+              </a:defRPr>
+            </a:lvl3pPr>
+            <a:lvl4pPr lvl="3" algn="l">
+              <a:lnSpc>
+                <a:spcPct val="100000"/>
+              </a:lnSpc>
+              <a:spcBef>
+                <a:spcPts val="0"/>
+              </a:spcBef>
+              <a:spcAft>
+                <a:spcPts val="0"/>
+              </a:spcAft>
+              <a:buClr>
+                <a:schemeClr val="lt1"/>
+              </a:buClr>
+              <a:buSzPts val="3600"/>
+              <a:buNone/>
+              <a:defRPr sz="3600">
+                <a:solidFill>
+                  <a:schemeClr val="lt1"/>
+                </a:solidFill>
+              </a:defRPr>
+            </a:lvl4pPr>
+            <a:lvl5pPr lvl="4" algn="l">
+              <a:lnSpc>
+                <a:spcPct val="100000"/>
+              </a:lnSpc>
+              <a:spcBef>
+                <a:spcPts val="0"/>
+              </a:spcBef>
+              <a:spcAft>
+                <a:spcPts val="0"/>
+              </a:spcAft>
+              <a:buClr>
+                <a:schemeClr val="lt1"/>
+              </a:buClr>
+              <a:buSzPts val="3600"/>
+              <a:buNone/>
+              <a:defRPr sz="3600">
+                <a:solidFill>
+                  <a:schemeClr val="lt1"/>
+                </a:solidFill>
+              </a:defRPr>
+            </a:lvl5pPr>
+            <a:lvl6pPr lvl="5" algn="l">
+              <a:lnSpc>
+                <a:spcPct val="100000"/>
+              </a:lnSpc>
+              <a:spcBef>
+                <a:spcPts val="0"/>
+              </a:spcBef>
+              <a:spcAft>
+                <a:spcPts val="0"/>
+              </a:spcAft>
+              <a:buClr>
+                <a:schemeClr val="lt1"/>
+              </a:buClr>
+              <a:buSzPts val="3600"/>
+              <a:buNone/>
+              <a:defRPr sz="3600">
+                <a:solidFill>
+                  <a:schemeClr val="lt1"/>
+                </a:solidFill>
+              </a:defRPr>
+            </a:lvl6pPr>
+            <a:lvl7pPr lvl="6" algn="l">
+              <a:lnSpc>
+                <a:spcPct val="100000"/>
+              </a:lnSpc>
+              <a:spcBef>
+                <a:spcPts val="0"/>
+              </a:spcBef>
+              <a:spcAft>
+                <a:spcPts val="0"/>
+              </a:spcAft>
+              <a:buClr>
+                <a:schemeClr val="lt1"/>
+              </a:buClr>
+              <a:buSzPts val="3600"/>
+              <a:buNone/>
+              <a:defRPr sz="3600">
+                <a:solidFill>
+                  <a:schemeClr val="lt1"/>
+                </a:solidFill>
+              </a:defRPr>
+            </a:lvl7pPr>
+            <a:lvl8pPr lvl="7" algn="l">
+              <a:lnSpc>
+                <a:spcPct val="100000"/>
+              </a:lnSpc>
+              <a:spcBef>
+                <a:spcPts val="0"/>
+              </a:spcBef>
+              <a:spcAft>
+                <a:spcPts val="0"/>
+              </a:spcAft>
+              <a:buClr>
+                <a:schemeClr val="lt1"/>
+              </a:buClr>
+              <a:buSzPts val="3600"/>
+              <a:buNone/>
+              <a:defRPr sz="3600">
+                <a:solidFill>
+                  <a:schemeClr val="lt1"/>
+                </a:solidFill>
+              </a:defRPr>
+            </a:lvl8pPr>
+            <a:lvl9pPr lvl="8" algn="l">
+              <a:lnSpc>
+                <a:spcPct val="100000"/>
+              </a:lnSpc>
+              <a:spcBef>
+                <a:spcPts val="0"/>
+              </a:spcBef>
+              <a:spcAft>
+                <a:spcPts val="0"/>
+              </a:spcAft>
+              <a:buClr>
+                <a:schemeClr val="lt1"/>
+              </a:buClr>
+              <a:buSzPts val="3600"/>
+              <a:buNone/>
+              <a:defRPr sz="3600">
+                <a:solidFill>
+                  <a:schemeClr val="lt1"/>
+                </a:solidFill>
+              </a:defRPr>
+            </a:lvl9pPr>
+          </a:lstStyle>
+          <a:p/>
+        </p:txBody>
+      </p:sp>
+      <p:sp>
+        <p:nvSpPr>
+          <p:cNvPr id="22" name="Google Shape;22;p60"/>
+          <p:cNvSpPr txBox="1"/>
+          <p:nvPr>
+            <p:ph idx="12" type="sldNum"/>
+          </p:nvPr>
+        </p:nvSpPr>
+        <p:spPr>
+          <a:xfrm>
+            <a:off x="8536302" y="4749851"/>
+            <a:ext cx="548700" cy="393600"/>
+          </a:xfrm>
+          <a:prstGeom prst="rect">
+            <a:avLst/>
+          </a:prstGeom>
+          <a:noFill/>
+          <a:ln>
+            <a:noFill/>
+          </a:ln>
+        </p:spPr>
+        <p:txBody>
+          <a:bodyPr anchorCtr="0" anchor="ctr" bIns="91425" lIns="91425" spcFirstLastPara="1" rIns="91425" wrap="square" tIns="91425">
+            <a:normAutofit/>
+          </a:bodyPr>
+          <a:lstStyle>
+            <a:lvl1pPr indent="0" lvl="0" marL="0" marR="0" algn="r">
+              <a:lnSpc>
+                <a:spcPct val="100000"/>
+              </a:lnSpc>
+              <a:spcBef>
+                <a:spcPts val="0"/>
+              </a:spcBef>
+              <a:spcAft>
+                <a:spcPts val="0"/>
+              </a:spcAft>
+              <a:buClr>
+                <a:srgbClr val="000000"/>
+              </a:buClr>
+              <a:buSzPts val="1000"/>
+              <a:buFont typeface="Arial"/>
+              <a:buNone/>
+              <a:defRPr b="0" i="0" sz="1000" u="none" cap="none" strike="noStrike">
+                <a:solidFill>
+                  <a:schemeClr val="lt1"/>
+                </a:solidFill>
+                <a:latin typeface="Lato"/>
+                <a:ea typeface="Lato"/>
+                <a:cs typeface="Lato"/>
+                <a:sym typeface="Lato"/>
+              </a:defRPr>
+            </a:lvl1pPr>
+            <a:lvl2pPr indent="0" lvl="1" marL="0" marR="0" algn="r">
+              <a:lnSpc>
+                <a:spcPct val="100000"/>
+              </a:lnSpc>
+              <a:spcBef>
+                <a:spcPts val="0"/>
+              </a:spcBef>
+              <a:spcAft>
+                <a:spcPts val="0"/>
+              </a:spcAft>
+              <a:buClr>
+                <a:srgbClr val="000000"/>
+              </a:buClr>
+              <a:buSzPts val="1000"/>
+              <a:buFont typeface="Arial"/>
+              <a:buNone/>
+              <a:defRPr b="0" i="0" sz="1000" u="none" cap="none" strike="noStrike">
+                <a:solidFill>
+                  <a:schemeClr val="lt1"/>
+                </a:solidFill>
+                <a:latin typeface="Lato"/>
+                <a:ea typeface="Lato"/>
+                <a:cs typeface="Lato"/>
+                <a:sym typeface="Lato"/>
+              </a:defRPr>
+            </a:lvl2pPr>
+            <a:lvl3pPr indent="0" lvl="2" marL="0" marR="0" algn="r">
+              <a:lnSpc>
+                <a:spcPct val="100000"/>
+              </a:lnSpc>
+              <a:spcBef>
+                <a:spcPts val="0"/>
+              </a:spcBef>
+              <a:spcAft>
+                <a:spcPts val="0"/>
+              </a:spcAft>
+              <a:buClr>
+                <a:srgbClr val="000000"/>
+              </a:buClr>
+              <a:buSzPts val="1000"/>
+              <a:buFont typeface="Arial"/>
+              <a:buNone/>
+              <a:defRPr b="0" i="0" sz="1000" u="none" cap="none" strike="noStrike">
+                <a:solidFill>
+                  <a:schemeClr val="lt1"/>
+                </a:solidFill>
+                <a:latin typeface="Lato"/>
+                <a:ea typeface="Lato"/>
+                <a:cs typeface="Lato"/>
+                <a:sym typeface="Lato"/>
+              </a:defRPr>
+            </a:lvl3pPr>
+            <a:lvl4pPr indent="0" lvl="3" marL="0" marR="0" algn="r">
+              <a:lnSpc>
+                <a:spcPct val="100000"/>
+              </a:lnSpc>
+              <a:spcBef>
+                <a:spcPts val="0"/>
+              </a:spcBef>
+              <a:spcAft>
+                <a:spcPts val="0"/>
+              </a:spcAft>
+              <a:buClr>
+                <a:srgbClr val="000000"/>
+              </a:buClr>
+              <a:buSzPts val="1000"/>
+              <a:buFont typeface="Arial"/>
+              <a:buNone/>
+              <a:defRPr b="0" i="0" sz="1000" u="none" cap="none" strike="noStrike">
+                <a:solidFill>
+                  <a:schemeClr val="lt1"/>
+                </a:solidFill>
+                <a:latin typeface="Lato"/>
+                <a:ea typeface="Lato"/>
+                <a:cs typeface="Lato"/>
+                <a:sym typeface="Lato"/>
+              </a:defRPr>
+            </a:lvl4pPr>
+            <a:lvl5pPr indent="0" lvl="4" marL="0" marR="0" algn="r">
+              <a:lnSpc>
+                <a:spcPct val="100000"/>
+              </a:lnSpc>
+              <a:spcBef>
+                <a:spcPts val="0"/>
+              </a:spcBef>
+              <a:spcAft>
+                <a:spcPts val="0"/>
+              </a:spcAft>
+              <a:buClr>
+                <a:srgbClr val="000000"/>
+              </a:buClr>
+              <a:buSzPts val="1000"/>
+              <a:buFont typeface="Arial"/>
+              <a:buNone/>
+              <a:defRPr b="0" i="0" sz="1000" u="none" cap="none" strike="noStrike">
+                <a:solidFill>
+                  <a:schemeClr val="lt1"/>
+                </a:solidFill>
+                <a:latin typeface="Lato"/>
+                <a:ea typeface="Lato"/>
+                <a:cs typeface="Lato"/>
+                <a:sym typeface="Lato"/>
+              </a:defRPr>
+            </a:lvl5pPr>
+            <a:lvl6pPr indent="0" lvl="5" marL="0" marR="0" algn="r">
+              <a:lnSpc>
+                <a:spcPct val="100000"/>
+              </a:lnSpc>
+              <a:spcBef>
+                <a:spcPts val="0"/>
+              </a:spcBef>
+              <a:spcAft>
+                <a:spcPts val="0"/>
+              </a:spcAft>
+              <a:buClr>
+                <a:srgbClr val="000000"/>
+              </a:buClr>
+              <a:buSzPts val="1000"/>
+              <a:buFont typeface="Arial"/>
+              <a:buNone/>
+              <a:defRPr b="0" i="0" sz="1000" u="none" cap="none" strike="noStrike">
+                <a:solidFill>
+                  <a:schemeClr val="lt1"/>
+                </a:solidFill>
+                <a:latin typeface="Lato"/>
+                <a:ea typeface="Lato"/>
+                <a:cs typeface="Lato"/>
+                <a:sym typeface="Lato"/>
+              </a:defRPr>
+            </a:lvl6pPr>
+            <a:lvl7pPr indent="0" lvl="6" marL="0" marR="0" algn="r">
+              <a:lnSpc>
+                <a:spcPct val="100000"/>
+              </a:lnSpc>
+              <a:spcBef>
+                <a:spcPts val="0"/>
+              </a:spcBef>
+              <a:spcAft>
+                <a:spcPts val="0"/>
+              </a:spcAft>
+              <a:buClr>
+                <a:srgbClr val="000000"/>
+              </a:buClr>
+              <a:buSzPts val="1000"/>
+              <a:buFont typeface="Arial"/>
+              <a:buNone/>
+              <a:defRPr b="0" i="0" sz="1000" u="none" cap="none" strike="noStrike">
+                <a:solidFill>
+                  <a:schemeClr val="lt1"/>
+                </a:solidFill>
+                <a:latin typeface="Lato"/>
+                <a:ea typeface="Lato"/>
+                <a:cs typeface="Lato"/>
+                <a:sym typeface="Lato"/>
+              </a:defRPr>
+            </a:lvl7pPr>
+            <a:lvl8pPr indent="0" lvl="7" marL="0" marR="0" algn="r">
+              <a:lnSpc>
+                <a:spcPct val="100000"/>
+              </a:lnSpc>
+              <a:spcBef>
+                <a:spcPts val="0"/>
+              </a:spcBef>
+              <a:spcAft>
+                <a:spcPts val="0"/>
+              </a:spcAft>
+              <a:buClr>
+                <a:srgbClr val="000000"/>
+              </a:buClr>
+              <a:buSzPts val="1000"/>
+              <a:buFont typeface="Arial"/>
+              <a:buNone/>
+              <a:defRPr b="0" i="0" sz="1000" u="none" cap="none" strike="noStrike">
+                <a:solidFill>
+                  <a:schemeClr val="lt1"/>
+                </a:solidFill>
+                <a:latin typeface="Lato"/>
+                <a:ea typeface="Lato"/>
+                <a:cs typeface="Lato"/>
+                <a:sym typeface="Lato"/>
+              </a:defRPr>
+            </a:lvl8pPr>
+            <a:lvl9pPr indent="0" lvl="8" marL="0" marR="0" algn="r">
+              <a:lnSpc>
+                <a:spcPct val="100000"/>
+              </a:lnSpc>
+              <a:spcBef>
+                <a:spcPts val="0"/>
+              </a:spcBef>
+              <a:spcAft>
+                <a:spcPts val="0"/>
+              </a:spcAft>
+              <a:buClr>
+                <a:srgbClr val="000000"/>
+              </a:buClr>
+              <a:buSzPts val="1000"/>
+              <a:buFont typeface="Arial"/>
+              <a:buNone/>
+              <a:defRPr b="0" i="0" sz="1000" u="none" cap="none" strike="noStrike">
+                <a:solidFill>
+                  <a:schemeClr val="lt1"/>
+                </a:solidFill>
+                <a:latin typeface="Lato"/>
+                <a:ea typeface="Lato"/>
+                <a:cs typeface="Lato"/>
+                <a:sym typeface="Lato"/>
+              </a:defRPr>
+            </a:lvl9pPr>
+          </a:lstStyle>
+          <a:p>
+            <a:pPr indent="0" lvl="0" marL="0" rtl="0" algn="r">
+              <a:spcBef>
+                <a:spcPts val="0"/>
+              </a:spcBef>
+              <a:spcAft>
+                <a:spcPts val="0"/>
+              </a:spcAft>
+              <a:buNone/>
+            </a:pPr>
+            <a:fld id="{00000000-1234-1234-1234-123412341234}" type="slidenum">
+              <a:rPr lang="es-419"/>
+              <a:t>‹#›</a:t>
+            </a:fld>
+            <a:endParaRPr/>
+          </a:p>
+        </p:txBody>
+      </p:sp>
+    </p:spTree>
+  </p:cSld>
+  <p:clrMapOvr>
+    <a:masterClrMapping/>
+  </p:clrMapOvr>
+</p:sldLayout>
+</file>
+
+<file path=ppt/slideLayouts/slideLayout3.xml><?xml version="1.0" encoding="utf-8"?>
+<p:sldLayout xmlns:a="http://schemas.openxmlformats.org/drawingml/2006/main" xmlns:r="http://schemas.openxmlformats.org/officeDocument/2006/relationships" xmlns:mc="http://schemas.openxmlformats.org/markup-compatibility/2006" xmlns:mv="urn:schemas-microsoft-com:mac:vml" xmlns:p="http://schemas.openxmlformats.org/presentationml/2006/main" xmlns:c="http://schemas.openxmlformats.org/drawingml/2006/chart" xmlns:dgm="http://schemas.openxmlformats.org/drawingml/2006/diagram" xmlns:o="urn:schemas-microsoft-com:office:office" xmlns:v="urn:schemas-microsoft-com:vml" xmlns:pvml="urn:schemas-microsoft-com:office:powerpoint" xmlns:com="http://schemas.openxmlformats.org/drawingml/2006/compatibility" xmlns:p14="http://schemas.microsoft.com/office/powerpoint/2010/main" xmlns:p15="http://schemas.microsoft.com/office/powerpoint/2012/main" xmlns:ahyp="http://schemas.microsoft.com/office/drawing/2018/hyperlinkcolor" matchingName="Title and body" type="tx">
+  <p:cSld name="TITLE_AND_BODY">
+    <p:spTree>
+      <p:nvGrpSpPr>
+        <p:cNvPr id="23" name="Shape 23"/>
+        <p:cNvGrpSpPr/>
+        <p:nvPr/>
+      </p:nvGrpSpPr>
+      <p:grpSpPr>
+        <a:xfrm>
+          <a:off x="0" y="0"/>
+          <a:ext cx="0" cy="0"/>
+          <a:chOff x="0" y="0"/>
+          <a:chExt cx="0" cy="0"/>
+        </a:xfrm>
+      </p:grpSpPr>
+      <p:sp>
+        <p:nvSpPr>
+          <p:cNvPr id="24" name="Google Shape;24;p58"/>
           <p:cNvSpPr/>
           <p:nvPr/>
         </p:nvSpPr>
@@ -4940,7 +5603,7 @@
       </p:sp>
       <p:grpSp>
         <p:nvGrpSpPr>
-          <p:cNvPr id="19" name="Google Shape;19;p58"/>
+          <p:cNvPr id="25" name="Google Shape;25;p58"/>
           <p:cNvGrpSpPr/>
           <p:nvPr/>
         </p:nvGrpSpPr>
@@ -4954,7 +5617,7 @@
         </p:grpSpPr>
         <p:sp>
           <p:nvSpPr>
-            <p:cNvPr id="20" name="Google Shape;20;p58"/>
+            <p:cNvPr id="26" name="Google Shape;26;p58"/>
             <p:cNvSpPr/>
             <p:nvPr/>
           </p:nvSpPr>
@@ -5013,7 +5676,7 @@
         </p:sp>
         <p:sp>
           <p:nvSpPr>
-            <p:cNvPr id="21" name="Google Shape;21;p58"/>
+            <p:cNvPr id="27" name="Google Shape;27;p58"/>
             <p:cNvSpPr/>
             <p:nvPr/>
           </p:nvSpPr>
@@ -5073,7 +5736,7 @@
       </p:grpSp>
       <p:sp>
         <p:nvSpPr>
-          <p:cNvPr id="22" name="Google Shape;22;p58"/>
+          <p:cNvPr id="28" name="Google Shape;28;p58"/>
           <p:cNvSpPr txBox="1"/>
           <p:nvPr>
             <p:ph type="title"/>
@@ -5229,7 +5892,7 @@
       </p:sp>
       <p:sp>
         <p:nvSpPr>
-          <p:cNvPr id="23" name="Google Shape;23;p58"/>
+          <p:cNvPr id="29" name="Google Shape;29;p58"/>
           <p:cNvSpPr txBox="1"/>
           <p:nvPr>
             <p:ph idx="1" type="body"/>
@@ -5385,7 +6048,7 @@
       </p:sp>
       <p:sp>
         <p:nvSpPr>
-          <p:cNvPr id="24" name="Google Shape;24;p58"/>
+          <p:cNvPr id="30" name="Google Shape;30;p58"/>
           <p:cNvSpPr txBox="1"/>
           <p:nvPr>
             <p:ph idx="12" type="sldNum"/>
@@ -5670,12 +6333,12 @@
 </p:sldLayout>
 </file>
 
-<file path=ppt/slideLayouts/slideLayout3.xml><?xml version="1.0" encoding="utf-8"?>
+<file path=ppt/slideLayouts/slideLayout4.xml><?xml version="1.0" encoding="utf-8"?>
 <p:sldLayout xmlns:a="http://schemas.openxmlformats.org/drawingml/2006/main" xmlns:r="http://schemas.openxmlformats.org/officeDocument/2006/relationships" xmlns:mc="http://schemas.openxmlformats.org/markup-compatibility/2006" xmlns:mv="urn:schemas-microsoft-com:mac:vml" xmlns:p="http://schemas.openxmlformats.org/presentationml/2006/main" xmlns:c="http://schemas.openxmlformats.org/drawingml/2006/chart" xmlns:dgm="http://schemas.openxmlformats.org/drawingml/2006/diagram" xmlns:o="urn:schemas-microsoft-com:office:office" xmlns:v="urn:schemas-microsoft-com:vml" xmlns:pvml="urn:schemas-microsoft-com:office:powerpoint" xmlns:com="http://schemas.openxmlformats.org/drawingml/2006/compatibility" xmlns:p14="http://schemas.microsoft.com/office/powerpoint/2010/main" xmlns:p15="http://schemas.microsoft.com/office/powerpoint/2012/main" xmlns:ahyp="http://schemas.microsoft.com/office/drawing/2018/hyperlinkcolor" matchingName="Section title and description">
   <p:cSld name="SECTION_TITLE_AND_DESCRIPTION">
     <p:spTree>
       <p:nvGrpSpPr>
-        <p:cNvPr id="25" name="Shape 25"/>
+        <p:cNvPr id="31" name="Shape 31"/>
         <p:cNvGrpSpPr/>
         <p:nvPr/>
       </p:nvGrpSpPr>
@@ -5689,7 +6352,7 @@
       </p:grpSpPr>
       <p:sp>
         <p:nvSpPr>
-          <p:cNvPr id="26" name="Google Shape;26;p59"/>
+          <p:cNvPr id="32" name="Google Shape;32;p59"/>
           <p:cNvSpPr/>
           <p:nvPr/>
         </p:nvSpPr>
@@ -5748,7 +6411,7 @@
       </p:sp>
       <p:grpSp>
         <p:nvGrpSpPr>
-          <p:cNvPr id="27" name="Google Shape;27;p59"/>
+          <p:cNvPr id="33" name="Google Shape;33;p59"/>
           <p:cNvGrpSpPr/>
           <p:nvPr/>
         </p:nvGrpSpPr>
@@ -5762,7 +6425,7 @@
         </p:grpSpPr>
         <p:sp>
           <p:nvSpPr>
-            <p:cNvPr id="28" name="Google Shape;28;p59"/>
+            <p:cNvPr id="34" name="Google Shape;34;p59"/>
             <p:cNvSpPr/>
             <p:nvPr/>
           </p:nvSpPr>
@@ -5821,7 +6484,7 @@
         </p:sp>
         <p:sp>
           <p:nvSpPr>
-            <p:cNvPr id="29" name="Google Shape;29;p59"/>
+            <p:cNvPr id="35" name="Google Shape;35;p59"/>
             <p:cNvSpPr/>
             <p:nvPr/>
           </p:nvSpPr>
@@ -5881,7 +6544,7 @@
       </p:grpSp>
       <p:sp>
         <p:nvSpPr>
-          <p:cNvPr id="30" name="Google Shape;30;p59"/>
+          <p:cNvPr id="36" name="Google Shape;36;p59"/>
           <p:cNvSpPr txBox="1"/>
           <p:nvPr>
             <p:ph type="title"/>
@@ -6037,7 +6700,7 @@
       </p:sp>
       <p:sp>
         <p:nvSpPr>
-          <p:cNvPr id="31" name="Google Shape;31;p59"/>
+          <p:cNvPr id="37" name="Google Shape;37;p59"/>
           <p:cNvSpPr txBox="1"/>
           <p:nvPr>
             <p:ph idx="1" type="subTitle"/>
@@ -6193,7 +6856,7 @@
       </p:sp>
       <p:sp>
         <p:nvSpPr>
-          <p:cNvPr id="32" name="Google Shape;32;p59"/>
+          <p:cNvPr id="38" name="Google Shape;38;p59"/>
           <p:cNvSpPr txBox="1"/>
           <p:nvPr>
             <p:ph idx="2" type="body"/>
@@ -6349,7 +7012,7 @@
       </p:sp>
       <p:sp>
         <p:nvSpPr>
-          <p:cNvPr id="33" name="Google Shape;33;p59"/>
+          <p:cNvPr id="39" name="Google Shape;39;p59"/>
           <p:cNvSpPr txBox="1"/>
           <p:nvPr>
             <p:ph idx="12" type="sldNum"/>
@@ -6600,669 +7263,6 @@
               <a:defRPr b="0" i="0" sz="1000" u="none" cap="none" strike="noStrike">
                 <a:solidFill>
                   <a:schemeClr val="accent1"/>
-                </a:solidFill>
-                <a:latin typeface="Lato"/>
-                <a:ea typeface="Lato"/>
-                <a:cs typeface="Lato"/>
-                <a:sym typeface="Lato"/>
-              </a:defRPr>
-            </a:lvl9pPr>
-          </a:lstStyle>
-          <a:p>
-            <a:pPr indent="0" lvl="0" marL="0" rtl="0" algn="r">
-              <a:spcBef>
-                <a:spcPts val="0"/>
-              </a:spcBef>
-              <a:spcAft>
-                <a:spcPts val="0"/>
-              </a:spcAft>
-              <a:buNone/>
-            </a:pPr>
-            <a:fld id="{00000000-1234-1234-1234-123412341234}" type="slidenum">
-              <a:rPr lang="es-419"/>
-              <a:t>‹#›</a:t>
-            </a:fld>
-            <a:endParaRPr/>
-          </a:p>
-        </p:txBody>
-      </p:sp>
-    </p:spTree>
-  </p:cSld>
-  <p:clrMapOvr>
-    <a:masterClrMapping/>
-  </p:clrMapOvr>
-</p:sldLayout>
-</file>
-
-<file path=ppt/slideLayouts/slideLayout4.xml><?xml version="1.0" encoding="utf-8"?>
-<p:sldLayout xmlns:a="http://schemas.openxmlformats.org/drawingml/2006/main" xmlns:r="http://schemas.openxmlformats.org/officeDocument/2006/relationships" xmlns:mc="http://schemas.openxmlformats.org/markup-compatibility/2006" xmlns:mv="urn:schemas-microsoft-com:mac:vml" xmlns:p="http://schemas.openxmlformats.org/presentationml/2006/main" xmlns:c="http://schemas.openxmlformats.org/drawingml/2006/chart" xmlns:dgm="http://schemas.openxmlformats.org/drawingml/2006/diagram" xmlns:o="urn:schemas-microsoft-com:office:office" xmlns:v="urn:schemas-microsoft-com:vml" xmlns:pvml="urn:schemas-microsoft-com:office:powerpoint" xmlns:com="http://schemas.openxmlformats.org/drawingml/2006/compatibility" xmlns:p14="http://schemas.microsoft.com/office/powerpoint/2010/main" xmlns:p15="http://schemas.microsoft.com/office/powerpoint/2012/main" xmlns:ahyp="http://schemas.microsoft.com/office/drawing/2018/hyperlinkcolor" matchingName="Section header" type="secHead">
-  <p:cSld name="SECTION_HEADER">
-    <p:bg>
-      <p:bgPr>
-        <a:solidFill>
-          <a:schemeClr val="dk1"/>
-        </a:solidFill>
-      </p:bgPr>
-    </p:bg>
-    <p:spTree>
-      <p:nvGrpSpPr>
-        <p:cNvPr id="34" name="Shape 34"/>
-        <p:cNvGrpSpPr/>
-        <p:nvPr/>
-      </p:nvGrpSpPr>
-      <p:grpSpPr>
-        <a:xfrm>
-          <a:off x="0" y="0"/>
-          <a:ext cx="0" cy="0"/>
-          <a:chOff x="0" y="0"/>
-          <a:chExt cx="0" cy="0"/>
-        </a:xfrm>
-      </p:grpSpPr>
-      <p:grpSp>
-        <p:nvGrpSpPr>
-          <p:cNvPr id="35" name="Google Shape;35;p60"/>
-          <p:cNvGrpSpPr/>
-          <p:nvPr/>
-        </p:nvGrpSpPr>
-        <p:grpSpPr>
-          <a:xfrm>
-            <a:off x="830392" y="1191256"/>
-            <a:ext cx="745763" cy="45826"/>
-            <a:chOff x="4580561" y="2589004"/>
-            <a:chExt cx="1064464" cy="25200"/>
-          </a:xfrm>
-        </p:grpSpPr>
-        <p:sp>
-          <p:nvSpPr>
-            <p:cNvPr id="36" name="Google Shape;36;p60"/>
-            <p:cNvSpPr/>
-            <p:nvPr/>
-          </p:nvSpPr>
-          <p:spPr>
-            <a:xfrm rot="-5400000">
-              <a:off x="5366325" y="2335504"/>
-              <a:ext cx="25200" cy="532200"/>
-            </a:xfrm>
-            <a:prstGeom prst="rect">
-              <a:avLst/>
-            </a:prstGeom>
-            <a:solidFill>
-              <a:schemeClr val="lt1"/>
-            </a:solidFill>
-            <a:ln>
-              <a:noFill/>
-            </a:ln>
-          </p:spPr>
-          <p:txBody>
-            <a:bodyPr anchorCtr="0" anchor="ctr" bIns="91425" lIns="91425" spcFirstLastPara="1" rIns="91425" wrap="square" tIns="91425">
-              <a:noAutofit/>
-            </a:bodyPr>
-            <a:lstStyle/>
-            <a:p>
-              <a:pPr indent="0" lvl="0" marL="0" marR="0" rtl="0" algn="l">
-                <a:lnSpc>
-                  <a:spcPct val="100000"/>
-                </a:lnSpc>
-                <a:spcBef>
-                  <a:spcPts val="0"/>
-                </a:spcBef>
-                <a:spcAft>
-                  <a:spcPts val="0"/>
-                </a:spcAft>
-                <a:buClr>
-                  <a:srgbClr val="000000"/>
-                </a:buClr>
-                <a:buSzPts val="1400"/>
-                <a:buFont typeface="Arial"/>
-                <a:buNone/>
-              </a:pPr>
-              <a:r>
-                <a:t/>
-              </a:r>
-              <a:endParaRPr b="0" i="0" sz="1400" u="none" cap="none" strike="noStrike">
-                <a:solidFill>
-                  <a:srgbClr val="000000"/>
-                </a:solidFill>
-                <a:latin typeface="Arial"/>
-                <a:ea typeface="Arial"/>
-                <a:cs typeface="Arial"/>
-                <a:sym typeface="Arial"/>
-              </a:endParaRPr>
-            </a:p>
-          </p:txBody>
-        </p:sp>
-        <p:sp>
-          <p:nvSpPr>
-            <p:cNvPr id="37" name="Google Shape;37;p60"/>
-            <p:cNvSpPr/>
-            <p:nvPr/>
-          </p:nvSpPr>
-          <p:spPr>
-            <a:xfrm rot="-5400000">
-              <a:off x="4836311" y="2333254"/>
-              <a:ext cx="25200" cy="536700"/>
-            </a:xfrm>
-            <a:prstGeom prst="rect">
-              <a:avLst/>
-            </a:prstGeom>
-            <a:solidFill>
-              <a:schemeClr val="lt1"/>
-            </a:solidFill>
-            <a:ln>
-              <a:noFill/>
-            </a:ln>
-          </p:spPr>
-          <p:txBody>
-            <a:bodyPr anchorCtr="0" anchor="ctr" bIns="91425" lIns="91425" spcFirstLastPara="1" rIns="91425" wrap="square" tIns="91425">
-              <a:noAutofit/>
-            </a:bodyPr>
-            <a:lstStyle/>
-            <a:p>
-              <a:pPr indent="0" lvl="0" marL="0" marR="0" rtl="0" algn="l">
-                <a:lnSpc>
-                  <a:spcPct val="100000"/>
-                </a:lnSpc>
-                <a:spcBef>
-                  <a:spcPts val="0"/>
-                </a:spcBef>
-                <a:spcAft>
-                  <a:spcPts val="0"/>
-                </a:spcAft>
-                <a:buClr>
-                  <a:srgbClr val="000000"/>
-                </a:buClr>
-                <a:buSzPts val="1400"/>
-                <a:buFont typeface="Arial"/>
-                <a:buNone/>
-              </a:pPr>
-              <a:r>
-                <a:t/>
-              </a:r>
-              <a:endParaRPr b="0" i="0" sz="1400" u="none" cap="none" strike="noStrike">
-                <a:solidFill>
-                  <a:srgbClr val="000000"/>
-                </a:solidFill>
-                <a:latin typeface="Arial"/>
-                <a:ea typeface="Arial"/>
-                <a:cs typeface="Arial"/>
-                <a:sym typeface="Arial"/>
-              </a:endParaRPr>
-            </a:p>
-          </p:txBody>
-        </p:sp>
-      </p:grpSp>
-      <p:sp>
-        <p:nvSpPr>
-          <p:cNvPr id="38" name="Google Shape;38;p60"/>
-          <p:cNvSpPr txBox="1"/>
-          <p:nvPr>
-            <p:ph type="title"/>
-          </p:nvPr>
-        </p:nvSpPr>
-        <p:spPr>
-          <a:xfrm>
-            <a:off x="729450" y="1322450"/>
-            <a:ext cx="7688400" cy="1518600"/>
-          </a:xfrm>
-          <a:prstGeom prst="rect">
-            <a:avLst/>
-          </a:prstGeom>
-          <a:noFill/>
-          <a:ln>
-            <a:noFill/>
-          </a:ln>
-        </p:spPr>
-        <p:txBody>
-          <a:bodyPr anchorCtr="0" anchor="t" bIns="91425" lIns="91425" spcFirstLastPara="1" rIns="91425" wrap="square" tIns="91425">
-            <a:normAutofit/>
-          </a:bodyPr>
-          <a:lstStyle>
-            <a:lvl1pPr lvl="0" algn="l">
-              <a:lnSpc>
-                <a:spcPct val="100000"/>
-              </a:lnSpc>
-              <a:spcBef>
-                <a:spcPts val="0"/>
-              </a:spcBef>
-              <a:spcAft>
-                <a:spcPts val="0"/>
-              </a:spcAft>
-              <a:buClr>
-                <a:schemeClr val="lt1"/>
-              </a:buClr>
-              <a:buSzPts val="3600"/>
-              <a:buNone/>
-              <a:defRPr sz="3600">
-                <a:solidFill>
-                  <a:schemeClr val="lt1"/>
-                </a:solidFill>
-              </a:defRPr>
-            </a:lvl1pPr>
-            <a:lvl2pPr lvl="1" algn="l">
-              <a:lnSpc>
-                <a:spcPct val="100000"/>
-              </a:lnSpc>
-              <a:spcBef>
-                <a:spcPts val="0"/>
-              </a:spcBef>
-              <a:spcAft>
-                <a:spcPts val="0"/>
-              </a:spcAft>
-              <a:buClr>
-                <a:schemeClr val="lt1"/>
-              </a:buClr>
-              <a:buSzPts val="3600"/>
-              <a:buNone/>
-              <a:defRPr sz="3600">
-                <a:solidFill>
-                  <a:schemeClr val="lt1"/>
-                </a:solidFill>
-              </a:defRPr>
-            </a:lvl2pPr>
-            <a:lvl3pPr lvl="2" algn="l">
-              <a:lnSpc>
-                <a:spcPct val="100000"/>
-              </a:lnSpc>
-              <a:spcBef>
-                <a:spcPts val="0"/>
-              </a:spcBef>
-              <a:spcAft>
-                <a:spcPts val="0"/>
-              </a:spcAft>
-              <a:buClr>
-                <a:schemeClr val="lt1"/>
-              </a:buClr>
-              <a:buSzPts val="3600"/>
-              <a:buNone/>
-              <a:defRPr sz="3600">
-                <a:solidFill>
-                  <a:schemeClr val="lt1"/>
-                </a:solidFill>
-              </a:defRPr>
-            </a:lvl3pPr>
-            <a:lvl4pPr lvl="3" algn="l">
-              <a:lnSpc>
-                <a:spcPct val="100000"/>
-              </a:lnSpc>
-              <a:spcBef>
-                <a:spcPts val="0"/>
-              </a:spcBef>
-              <a:spcAft>
-                <a:spcPts val="0"/>
-              </a:spcAft>
-              <a:buClr>
-                <a:schemeClr val="lt1"/>
-              </a:buClr>
-              <a:buSzPts val="3600"/>
-              <a:buNone/>
-              <a:defRPr sz="3600">
-                <a:solidFill>
-                  <a:schemeClr val="lt1"/>
-                </a:solidFill>
-              </a:defRPr>
-            </a:lvl4pPr>
-            <a:lvl5pPr lvl="4" algn="l">
-              <a:lnSpc>
-                <a:spcPct val="100000"/>
-              </a:lnSpc>
-              <a:spcBef>
-                <a:spcPts val="0"/>
-              </a:spcBef>
-              <a:spcAft>
-                <a:spcPts val="0"/>
-              </a:spcAft>
-              <a:buClr>
-                <a:schemeClr val="lt1"/>
-              </a:buClr>
-              <a:buSzPts val="3600"/>
-              <a:buNone/>
-              <a:defRPr sz="3600">
-                <a:solidFill>
-                  <a:schemeClr val="lt1"/>
-                </a:solidFill>
-              </a:defRPr>
-            </a:lvl5pPr>
-            <a:lvl6pPr lvl="5" algn="l">
-              <a:lnSpc>
-                <a:spcPct val="100000"/>
-              </a:lnSpc>
-              <a:spcBef>
-                <a:spcPts val="0"/>
-              </a:spcBef>
-              <a:spcAft>
-                <a:spcPts val="0"/>
-              </a:spcAft>
-              <a:buClr>
-                <a:schemeClr val="lt1"/>
-              </a:buClr>
-              <a:buSzPts val="3600"/>
-              <a:buNone/>
-              <a:defRPr sz="3600">
-                <a:solidFill>
-                  <a:schemeClr val="lt1"/>
-                </a:solidFill>
-              </a:defRPr>
-            </a:lvl6pPr>
-            <a:lvl7pPr lvl="6" algn="l">
-              <a:lnSpc>
-                <a:spcPct val="100000"/>
-              </a:lnSpc>
-              <a:spcBef>
-                <a:spcPts val="0"/>
-              </a:spcBef>
-              <a:spcAft>
-                <a:spcPts val="0"/>
-              </a:spcAft>
-              <a:buClr>
-                <a:schemeClr val="lt1"/>
-              </a:buClr>
-              <a:buSzPts val="3600"/>
-              <a:buNone/>
-              <a:defRPr sz="3600">
-                <a:solidFill>
-                  <a:schemeClr val="lt1"/>
-                </a:solidFill>
-              </a:defRPr>
-            </a:lvl7pPr>
-            <a:lvl8pPr lvl="7" algn="l">
-              <a:lnSpc>
-                <a:spcPct val="100000"/>
-              </a:lnSpc>
-              <a:spcBef>
-                <a:spcPts val="0"/>
-              </a:spcBef>
-              <a:spcAft>
-                <a:spcPts val="0"/>
-              </a:spcAft>
-              <a:buClr>
-                <a:schemeClr val="lt1"/>
-              </a:buClr>
-              <a:buSzPts val="3600"/>
-              <a:buNone/>
-              <a:defRPr sz="3600">
-                <a:solidFill>
-                  <a:schemeClr val="lt1"/>
-                </a:solidFill>
-              </a:defRPr>
-            </a:lvl8pPr>
-            <a:lvl9pPr lvl="8" algn="l">
-              <a:lnSpc>
-                <a:spcPct val="100000"/>
-              </a:lnSpc>
-              <a:spcBef>
-                <a:spcPts val="0"/>
-              </a:spcBef>
-              <a:spcAft>
-                <a:spcPts val="0"/>
-              </a:spcAft>
-              <a:buClr>
-                <a:schemeClr val="lt1"/>
-              </a:buClr>
-              <a:buSzPts val="3600"/>
-              <a:buNone/>
-              <a:defRPr sz="3600">
-                <a:solidFill>
-                  <a:schemeClr val="lt1"/>
-                </a:solidFill>
-              </a:defRPr>
-            </a:lvl9pPr>
-          </a:lstStyle>
-          <a:p/>
-        </p:txBody>
-      </p:sp>
-      <p:sp>
-        <p:nvSpPr>
-          <p:cNvPr id="39" name="Google Shape;39;p60"/>
-          <p:cNvSpPr txBox="1"/>
-          <p:nvPr>
-            <p:ph idx="12" type="sldNum"/>
-          </p:nvPr>
-        </p:nvSpPr>
-        <p:spPr>
-          <a:xfrm>
-            <a:off x="8536302" y="4749851"/>
-            <a:ext cx="548700" cy="393600"/>
-          </a:xfrm>
-          <a:prstGeom prst="rect">
-            <a:avLst/>
-          </a:prstGeom>
-          <a:noFill/>
-          <a:ln>
-            <a:noFill/>
-          </a:ln>
-        </p:spPr>
-        <p:txBody>
-          <a:bodyPr anchorCtr="0" anchor="ctr" bIns="91425" lIns="91425" spcFirstLastPara="1" rIns="91425" wrap="square" tIns="91425">
-            <a:normAutofit/>
-          </a:bodyPr>
-          <a:lstStyle>
-            <a:lvl1pPr indent="0" lvl="0" marL="0" marR="0" algn="r">
-              <a:lnSpc>
-                <a:spcPct val="100000"/>
-              </a:lnSpc>
-              <a:spcBef>
-                <a:spcPts val="0"/>
-              </a:spcBef>
-              <a:spcAft>
-                <a:spcPts val="0"/>
-              </a:spcAft>
-              <a:buClr>
-                <a:srgbClr val="000000"/>
-              </a:buClr>
-              <a:buSzPts val="1000"/>
-              <a:buFont typeface="Arial"/>
-              <a:buNone/>
-              <a:defRPr b="0" i="0" sz="1000" u="none" cap="none" strike="noStrike">
-                <a:solidFill>
-                  <a:schemeClr val="lt1"/>
-                </a:solidFill>
-                <a:latin typeface="Lato"/>
-                <a:ea typeface="Lato"/>
-                <a:cs typeface="Lato"/>
-                <a:sym typeface="Lato"/>
-              </a:defRPr>
-            </a:lvl1pPr>
-            <a:lvl2pPr indent="0" lvl="1" marL="0" marR="0" algn="r">
-              <a:lnSpc>
-                <a:spcPct val="100000"/>
-              </a:lnSpc>
-              <a:spcBef>
-                <a:spcPts val="0"/>
-              </a:spcBef>
-              <a:spcAft>
-                <a:spcPts val="0"/>
-              </a:spcAft>
-              <a:buClr>
-                <a:srgbClr val="000000"/>
-              </a:buClr>
-              <a:buSzPts val="1000"/>
-              <a:buFont typeface="Arial"/>
-              <a:buNone/>
-              <a:defRPr b="0" i="0" sz="1000" u="none" cap="none" strike="noStrike">
-                <a:solidFill>
-                  <a:schemeClr val="lt1"/>
-                </a:solidFill>
-                <a:latin typeface="Lato"/>
-                <a:ea typeface="Lato"/>
-                <a:cs typeface="Lato"/>
-                <a:sym typeface="Lato"/>
-              </a:defRPr>
-            </a:lvl2pPr>
-            <a:lvl3pPr indent="0" lvl="2" marL="0" marR="0" algn="r">
-              <a:lnSpc>
-                <a:spcPct val="100000"/>
-              </a:lnSpc>
-              <a:spcBef>
-                <a:spcPts val="0"/>
-              </a:spcBef>
-              <a:spcAft>
-                <a:spcPts val="0"/>
-              </a:spcAft>
-              <a:buClr>
-                <a:srgbClr val="000000"/>
-              </a:buClr>
-              <a:buSzPts val="1000"/>
-              <a:buFont typeface="Arial"/>
-              <a:buNone/>
-              <a:defRPr b="0" i="0" sz="1000" u="none" cap="none" strike="noStrike">
-                <a:solidFill>
-                  <a:schemeClr val="lt1"/>
-                </a:solidFill>
-                <a:latin typeface="Lato"/>
-                <a:ea typeface="Lato"/>
-                <a:cs typeface="Lato"/>
-                <a:sym typeface="Lato"/>
-              </a:defRPr>
-            </a:lvl3pPr>
-            <a:lvl4pPr indent="0" lvl="3" marL="0" marR="0" algn="r">
-              <a:lnSpc>
-                <a:spcPct val="100000"/>
-              </a:lnSpc>
-              <a:spcBef>
-                <a:spcPts val="0"/>
-              </a:spcBef>
-              <a:spcAft>
-                <a:spcPts val="0"/>
-              </a:spcAft>
-              <a:buClr>
-                <a:srgbClr val="000000"/>
-              </a:buClr>
-              <a:buSzPts val="1000"/>
-              <a:buFont typeface="Arial"/>
-              <a:buNone/>
-              <a:defRPr b="0" i="0" sz="1000" u="none" cap="none" strike="noStrike">
-                <a:solidFill>
-                  <a:schemeClr val="lt1"/>
-                </a:solidFill>
-                <a:latin typeface="Lato"/>
-                <a:ea typeface="Lato"/>
-                <a:cs typeface="Lato"/>
-                <a:sym typeface="Lato"/>
-              </a:defRPr>
-            </a:lvl4pPr>
-            <a:lvl5pPr indent="0" lvl="4" marL="0" marR="0" algn="r">
-              <a:lnSpc>
-                <a:spcPct val="100000"/>
-              </a:lnSpc>
-              <a:spcBef>
-                <a:spcPts val="0"/>
-              </a:spcBef>
-              <a:spcAft>
-                <a:spcPts val="0"/>
-              </a:spcAft>
-              <a:buClr>
-                <a:srgbClr val="000000"/>
-              </a:buClr>
-              <a:buSzPts val="1000"/>
-              <a:buFont typeface="Arial"/>
-              <a:buNone/>
-              <a:defRPr b="0" i="0" sz="1000" u="none" cap="none" strike="noStrike">
-                <a:solidFill>
-                  <a:schemeClr val="lt1"/>
-                </a:solidFill>
-                <a:latin typeface="Lato"/>
-                <a:ea typeface="Lato"/>
-                <a:cs typeface="Lato"/>
-                <a:sym typeface="Lato"/>
-              </a:defRPr>
-            </a:lvl5pPr>
-            <a:lvl6pPr indent="0" lvl="5" marL="0" marR="0" algn="r">
-              <a:lnSpc>
-                <a:spcPct val="100000"/>
-              </a:lnSpc>
-              <a:spcBef>
-                <a:spcPts val="0"/>
-              </a:spcBef>
-              <a:spcAft>
-                <a:spcPts val="0"/>
-              </a:spcAft>
-              <a:buClr>
-                <a:srgbClr val="000000"/>
-              </a:buClr>
-              <a:buSzPts val="1000"/>
-              <a:buFont typeface="Arial"/>
-              <a:buNone/>
-              <a:defRPr b="0" i="0" sz="1000" u="none" cap="none" strike="noStrike">
-                <a:solidFill>
-                  <a:schemeClr val="lt1"/>
-                </a:solidFill>
-                <a:latin typeface="Lato"/>
-                <a:ea typeface="Lato"/>
-                <a:cs typeface="Lato"/>
-                <a:sym typeface="Lato"/>
-              </a:defRPr>
-            </a:lvl6pPr>
-            <a:lvl7pPr indent="0" lvl="6" marL="0" marR="0" algn="r">
-              <a:lnSpc>
-                <a:spcPct val="100000"/>
-              </a:lnSpc>
-              <a:spcBef>
-                <a:spcPts val="0"/>
-              </a:spcBef>
-              <a:spcAft>
-                <a:spcPts val="0"/>
-              </a:spcAft>
-              <a:buClr>
-                <a:srgbClr val="000000"/>
-              </a:buClr>
-              <a:buSzPts val="1000"/>
-              <a:buFont typeface="Arial"/>
-              <a:buNone/>
-              <a:defRPr b="0" i="0" sz="1000" u="none" cap="none" strike="noStrike">
-                <a:solidFill>
-                  <a:schemeClr val="lt1"/>
-                </a:solidFill>
-                <a:latin typeface="Lato"/>
-                <a:ea typeface="Lato"/>
-                <a:cs typeface="Lato"/>
-                <a:sym typeface="Lato"/>
-              </a:defRPr>
-            </a:lvl7pPr>
-            <a:lvl8pPr indent="0" lvl="7" marL="0" marR="0" algn="r">
-              <a:lnSpc>
-                <a:spcPct val="100000"/>
-              </a:lnSpc>
-              <a:spcBef>
-                <a:spcPts val="0"/>
-              </a:spcBef>
-              <a:spcAft>
-                <a:spcPts val="0"/>
-              </a:spcAft>
-              <a:buClr>
-                <a:srgbClr val="000000"/>
-              </a:buClr>
-              <a:buSzPts val="1000"/>
-              <a:buFont typeface="Arial"/>
-              <a:buNone/>
-              <a:defRPr b="0" i="0" sz="1000" u="none" cap="none" strike="noStrike">
-                <a:solidFill>
-                  <a:schemeClr val="lt1"/>
-                </a:solidFill>
-                <a:latin typeface="Lato"/>
-                <a:ea typeface="Lato"/>
-                <a:cs typeface="Lato"/>
-                <a:sym typeface="Lato"/>
-              </a:defRPr>
-            </a:lvl8pPr>
-            <a:lvl9pPr indent="0" lvl="8" marL="0" marR="0" algn="r">
-              <a:lnSpc>
-                <a:spcPct val="100000"/>
-              </a:lnSpc>
-              <a:spcBef>
-                <a:spcPts val="0"/>
-              </a:spcBef>
-              <a:spcAft>
-                <a:spcPts val="0"/>
-              </a:spcAft>
-              <a:buClr>
-                <a:srgbClr val="000000"/>
-              </a:buClr>
-              <a:buSzPts val="1000"/>
-              <a:buFont typeface="Arial"/>
-              <a:buNone/>
-              <a:defRPr b="0" i="0" sz="1000" u="none" cap="none" strike="noStrike">
-                <a:solidFill>
-                  <a:schemeClr val="lt1"/>
                 </a:solidFill>
                 <a:latin typeface="Lato"/>
                 <a:ea typeface="Lato"/>
@@ -11607,7 +11607,7 @@
           <a:srgbClr val="000000"/>
         </a:buClr>
         <a:buFont typeface="Arial"/>
-        <a:defRPr b="0" i="0" sz="1400" u="none" cap="none" strike="noStrike">
+        <a:defRPr b="0" i="0" spc="0" sz="1400" u="none" cap="none" strike="noStrike">
           <a:solidFill>
             <a:srgbClr val="000000"/>
           </a:solidFill>
@@ -11631,7 +11631,7 @@
           <a:srgbClr val="000000"/>
         </a:buClr>
         <a:buFont typeface="Arial"/>
-        <a:defRPr b="0" i="0" sz="1400" u="none" cap="none" strike="noStrike">
+        <a:defRPr b="0" i="0" spc="0" sz="1400" u="none" cap="none" strike="noStrike">
           <a:solidFill>
             <a:srgbClr val="000000"/>
           </a:solidFill>
@@ -11655,7 +11655,7 @@
           <a:srgbClr val="000000"/>
         </a:buClr>
         <a:buFont typeface="Arial"/>
-        <a:defRPr b="0" i="0" sz="1400" u="none" cap="none" strike="noStrike">
+        <a:defRPr b="0" i="0" spc="0" sz="1400" u="none" cap="none" strike="noStrike">
           <a:solidFill>
             <a:srgbClr val="000000"/>
           </a:solidFill>
@@ -11679,7 +11679,7 @@
           <a:srgbClr val="000000"/>
         </a:buClr>
         <a:buFont typeface="Arial"/>
-        <a:defRPr b="0" i="0" sz="1400" u="none" cap="none" strike="noStrike">
+        <a:defRPr b="0" i="0" spc="0" sz="1400" u="none" cap="none" strike="noStrike">
           <a:solidFill>
             <a:srgbClr val="000000"/>
           </a:solidFill>
@@ -11703,7 +11703,7 @@
           <a:srgbClr val="000000"/>
         </a:buClr>
         <a:buFont typeface="Arial"/>
-        <a:defRPr b="0" i="0" sz="1400" u="none" cap="none" strike="noStrike">
+        <a:defRPr b="0" i="0" spc="0" sz="1400" u="none" cap="none" strike="noStrike">
           <a:solidFill>
             <a:srgbClr val="000000"/>
           </a:solidFill>
@@ -11727,7 +11727,7 @@
           <a:srgbClr val="000000"/>
         </a:buClr>
         <a:buFont typeface="Arial"/>
-        <a:defRPr b="0" i="0" sz="1400" u="none" cap="none" strike="noStrike">
+        <a:defRPr b="0" i="0" spc="0" sz="1400" u="none" cap="none" strike="noStrike">
           <a:solidFill>
             <a:srgbClr val="000000"/>
           </a:solidFill>
@@ -11751,7 +11751,7 @@
           <a:srgbClr val="000000"/>
         </a:buClr>
         <a:buFont typeface="Arial"/>
-        <a:defRPr b="0" i="0" sz="1400" u="none" cap="none" strike="noStrike">
+        <a:defRPr b="0" i="0" spc="0" sz="1400" u="none" cap="none" strike="noStrike">
           <a:solidFill>
             <a:srgbClr val="000000"/>
           </a:solidFill>
@@ -11775,7 +11775,7 @@
           <a:srgbClr val="000000"/>
         </a:buClr>
         <a:buFont typeface="Arial"/>
-        <a:defRPr b="0" i="0" sz="1400" u="none" cap="none" strike="noStrike">
+        <a:defRPr b="0" i="0" spc="0" sz="1400" u="none" cap="none" strike="noStrike">
           <a:solidFill>
             <a:srgbClr val="000000"/>
           </a:solidFill>
@@ -11799,7 +11799,7 @@
           <a:srgbClr val="000000"/>
         </a:buClr>
         <a:buFont typeface="Arial"/>
-        <a:defRPr b="0" i="0" sz="1400" u="none" cap="none" strike="noStrike">
+        <a:defRPr b="0" i="0" spc="0" sz="1400" u="none" cap="none" strike="noStrike">
           <a:solidFill>
             <a:srgbClr val="000000"/>
           </a:solidFill>
@@ -11836,7 +11836,7 @@
           <a:srgbClr val="000000"/>
         </a:buClr>
         <a:buFont typeface="Arial"/>
-        <a:defRPr b="0" i="0" sz="1400" u="none" cap="none" strike="noStrike">
+        <a:defRPr b="0" i="0" spc="0" sz="1400" u="none" cap="none" strike="noStrike">
           <a:solidFill>
             <a:srgbClr val="000000"/>
           </a:solidFill>
@@ -11860,7 +11860,7 @@
           <a:srgbClr val="000000"/>
         </a:buClr>
         <a:buFont typeface="Arial"/>
-        <a:defRPr b="0" i="0" sz="1400" u="none" cap="none" strike="noStrike">
+        <a:defRPr b="0" i="0" spc="0" sz="1400" u="none" cap="none" strike="noStrike">
           <a:solidFill>
             <a:srgbClr val="000000"/>
           </a:solidFill>
@@ -11884,7 +11884,7 @@
           <a:srgbClr val="000000"/>
         </a:buClr>
         <a:buFont typeface="Arial"/>
-        <a:defRPr b="0" i="0" sz="1400" u="none" cap="none" strike="noStrike">
+        <a:defRPr b="0" i="0" spc="0" sz="1400" u="none" cap="none" strike="noStrike">
           <a:solidFill>
             <a:srgbClr val="000000"/>
           </a:solidFill>
@@ -11908,7 +11908,7 @@
           <a:srgbClr val="000000"/>
         </a:buClr>
         <a:buFont typeface="Arial"/>
-        <a:defRPr b="0" i="0" sz="1400" u="none" cap="none" strike="noStrike">
+        <a:defRPr b="0" i="0" spc="0" sz="1400" u="none" cap="none" strike="noStrike">
           <a:solidFill>
             <a:srgbClr val="000000"/>
           </a:solidFill>
@@ -11932,7 +11932,7 @@
           <a:srgbClr val="000000"/>
         </a:buClr>
         <a:buFont typeface="Arial"/>
-        <a:defRPr b="0" i="0" sz="1400" u="none" cap="none" strike="noStrike">
+        <a:defRPr b="0" i="0" spc="0" sz="1400" u="none" cap="none" strike="noStrike">
           <a:solidFill>
             <a:srgbClr val="000000"/>
           </a:solidFill>
@@ -11956,7 +11956,7 @@
           <a:srgbClr val="000000"/>
         </a:buClr>
         <a:buFont typeface="Arial"/>
-        <a:defRPr b="0" i="0" sz="1400" u="none" cap="none" strike="noStrike">
+        <a:defRPr b="0" i="0" spc="0" sz="1400" u="none" cap="none" strike="noStrike">
           <a:solidFill>
             <a:srgbClr val="000000"/>
           </a:solidFill>
@@ -11980,7 +11980,7 @@
           <a:srgbClr val="000000"/>
         </a:buClr>
         <a:buFont typeface="Arial"/>
-        <a:defRPr b="0" i="0" sz="1400" u="none" cap="none" strike="noStrike">
+        <a:defRPr b="0" i="0" spc="0" sz="1400" u="none" cap="none" strike="noStrike">
           <a:solidFill>
             <a:srgbClr val="000000"/>
           </a:solidFill>
@@ -12004,7 +12004,7 @@
           <a:srgbClr val="000000"/>
         </a:buClr>
         <a:buFont typeface="Arial"/>
-        <a:defRPr b="0" i="0" sz="1400" u="none" cap="none" strike="noStrike">
+        <a:defRPr b="0" i="0" spc="0" sz="1400" u="none" cap="none" strike="noStrike">
           <a:solidFill>
             <a:srgbClr val="000000"/>
           </a:solidFill>
@@ -12028,7 +12028,7 @@
           <a:srgbClr val="000000"/>
         </a:buClr>
         <a:buFont typeface="Arial"/>
-        <a:defRPr b="0" i="0" sz="1400" u="none" cap="none" strike="noStrike">
+        <a:defRPr b="0" i="0" spc="0" sz="1400" u="none" cap="none" strike="noStrike">
           <a:solidFill>
             <a:srgbClr val="000000"/>
           </a:solidFill>
@@ -12065,7 +12065,7 @@
           <a:srgbClr val="000000"/>
         </a:buClr>
         <a:buFont typeface="Arial"/>
-        <a:defRPr b="0" i="0" sz="1400" u="none" cap="none" strike="noStrike">
+        <a:defRPr b="0" i="0" spc="0" sz="1400" u="none" cap="none" strike="noStrike">
           <a:solidFill>
             <a:srgbClr val="000000"/>
           </a:solidFill>
@@ -12089,7 +12089,7 @@
           <a:srgbClr val="000000"/>
         </a:buClr>
         <a:buFont typeface="Arial"/>
-        <a:defRPr b="0" i="0" sz="1400" u="none" cap="none" strike="noStrike">
+        <a:defRPr b="0" i="0" spc="0" sz="1400" u="none" cap="none" strike="noStrike">
           <a:solidFill>
             <a:srgbClr val="000000"/>
           </a:solidFill>
@@ -12113,7 +12113,7 @@
           <a:srgbClr val="000000"/>
         </a:buClr>
         <a:buFont typeface="Arial"/>
-        <a:defRPr b="0" i="0" sz="1400" u="none" cap="none" strike="noStrike">
+        <a:defRPr b="0" i="0" spc="0" sz="1400" u="none" cap="none" strike="noStrike">
           <a:solidFill>
             <a:srgbClr val="000000"/>
           </a:solidFill>
@@ -12137,7 +12137,7 @@
           <a:srgbClr val="000000"/>
         </a:buClr>
         <a:buFont typeface="Arial"/>
-        <a:defRPr b="0" i="0" sz="1400" u="none" cap="none" strike="noStrike">
+        <a:defRPr b="0" i="0" spc="0" sz="1400" u="none" cap="none" strike="noStrike">
           <a:solidFill>
             <a:srgbClr val="000000"/>
           </a:solidFill>
@@ -12161,7 +12161,7 @@
           <a:srgbClr val="000000"/>
         </a:buClr>
         <a:buFont typeface="Arial"/>
-        <a:defRPr b="0" i="0" sz="1400" u="none" cap="none" strike="noStrike">
+        <a:defRPr b="0" i="0" spc="0" sz="1400" u="none" cap="none" strike="noStrike">
           <a:solidFill>
             <a:srgbClr val="000000"/>
           </a:solidFill>
@@ -12185,7 +12185,7 @@
           <a:srgbClr val="000000"/>
         </a:buClr>
         <a:buFont typeface="Arial"/>
-        <a:defRPr b="0" i="0" sz="1400" u="none" cap="none" strike="noStrike">
+        <a:defRPr b="0" i="0" spc="0" sz="1400" u="none" cap="none" strike="noStrike">
           <a:solidFill>
             <a:srgbClr val="000000"/>
           </a:solidFill>
@@ -12209,7 +12209,7 @@
           <a:srgbClr val="000000"/>
         </a:buClr>
         <a:buFont typeface="Arial"/>
-        <a:defRPr b="0" i="0" sz="1400" u="none" cap="none" strike="noStrike">
+        <a:defRPr b="0" i="0" spc="0" sz="1400" u="none" cap="none" strike="noStrike">
           <a:solidFill>
             <a:srgbClr val="000000"/>
           </a:solidFill>
@@ -12233,7 +12233,7 @@
           <a:srgbClr val="000000"/>
         </a:buClr>
         <a:buFont typeface="Arial"/>
-        <a:defRPr b="0" i="0" sz="1400" u="none" cap="none" strike="noStrike">
+        <a:defRPr b="0" i="0" spc="0" sz="1400" u="none" cap="none" strike="noStrike">
           <a:solidFill>
             <a:srgbClr val="000000"/>
           </a:solidFill>
@@ -12257,7 +12257,7 @@
           <a:srgbClr val="000000"/>
         </a:buClr>
         <a:buFont typeface="Arial"/>
-        <a:defRPr b="0" i="0" sz="1400" u="none" cap="none" strike="noStrike">
+        <a:defRPr b="0" i="0" spc="0" sz="1400" u="none" cap="none" strike="noStrike">
           <a:solidFill>
             <a:srgbClr val="000000"/>
           </a:solidFill>
